--- a/02_簡報/02_中道森活_命名提案簡報.pptx
+++ b/02_簡報/02_中道森活_命名提案簡報.pptx
@@ -7325,7 +7325,7 @@
                 <a:latin typeface="Microsoft JhengHei"/>
                 <a:ea typeface="Microsoft JhengHei"/>
               </a:rPr>
-              <a:t>璞域品牌策略｜crazywofes@gmail.com</a:t>
+              <a:t>璞域品牌策略｜www.pure-branding.com</a:t>
             </a:r>
           </a:p>
         </p:txBody>

--- a/02_簡報/02_中道森活_命名提案簡報.pptx
+++ b/02_簡報/02_中道森活_命名提案簡報.pptx
@@ -3795,7 +3795,7 @@
                 <a:latin typeface="Microsoft JhengHei"/>
                 <a:ea typeface="Microsoft JhengHei"/>
               </a:rPr>
-              <a:t>TA3 退休置產 + TA1 返鄉換屋</a:t>
+              <a:t>TA1 返鄉換屋 + TA3 退休置產</a:t>
             </a:r>
           </a:p>
         </p:txBody>
@@ -3835,7 +3835,7 @@
                 <a:latin typeface="Microsoft JhengHei"/>
                 <a:ea typeface="Microsoft JhengHei"/>
               </a:rPr>
-              <a:t>「在繁華之中，找到一個栖息」</a:t>
+              <a:t>「中道學區一條龍｜在繁華之中栖息」</a:t>
             </a:r>
           </a:p>
         </p:txBody>
@@ -3961,7 +3961,7 @@
                 <a:latin typeface="Microsoft JhengHei"/>
                 <a:ea typeface="Microsoft JhengHei"/>
               </a:rPr>
-              <a:t>中道森活 III</a:t>
+              <a:t>中道森活</a:t>
             </a:r>
           </a:p>
         </p:txBody>
@@ -4001,7 +4001,7 @@
                 <a:latin typeface="Microsoft JhengHei"/>
                 <a:ea typeface="Microsoft JhengHei"/>
               </a:rPr>
-              <a:t>TA1 返鄉換屋 + TA2 在地二代</a:t>
+              <a:t>全 TA 安全牌</a:t>
             </a:r>
           </a:p>
         </p:txBody>
@@ -4041,7 +4041,7 @@
                 <a:latin typeface="Microsoft JhengHei"/>
                 <a:ea typeface="Microsoft JhengHei"/>
               </a:rPr>
-              <a:t>「鼎弘森活，第三個家的故事」</a:t>
+              <a:t>「孩子在中道，家就在中道」</a:t>
             </a:r>
           </a:p>
         </p:txBody>
@@ -4167,7 +4167,7 @@
                 <a:latin typeface="Microsoft JhengHei"/>
                 <a:ea typeface="Microsoft JhengHei"/>
               </a:rPr>
-              <a:t>中道森活</a:t>
+              <a:t>中道森活 III</a:t>
             </a:r>
           </a:p>
         </p:txBody>
@@ -4207,7 +4207,7 @@
                 <a:latin typeface="Microsoft JhengHei"/>
                 <a:ea typeface="Microsoft JhengHei"/>
               </a:rPr>
-              <a:t>全 TA 安全牌</a:t>
+              <a:t>TA1 + TA2</a:t>
             </a:r>
           </a:p>
         </p:txBody>
@@ -4247,7 +4247,7 @@
                 <a:latin typeface="Microsoft JhengHei"/>
                 <a:ea typeface="Microsoft JhengHei"/>
               </a:rPr>
-              <a:t>「玉田之後，中道再續」</a:t>
+              <a:t>「鼎弘森活，第三個家的故事」</a:t>
             </a:r>
           </a:p>
         </p:txBody>
@@ -5310,7 +5310,7 @@
         </p:nvGraphicFramePr>
         <p:xfrm>
           <a:off x="457200" y="1554480"/>
-          <a:ext cx="11247120" cy="4114800"/>
+          <a:ext cx="11247120" cy="3657600"/>
         </p:xfrm>
         <a:graphic>
           <a:graphicData uri="http://schemas.openxmlformats.org/drawingml/2006/table">
@@ -5325,7 +5325,7 @@
                 <a:gridCol w="2249424"/>
                 <a:gridCol w="2249424"/>
               </a:tblGrid>
-              <a:tr h="685800">
+              <a:tr h="609600">
                 <a:tc>
                   <a:txBody>
                     <a:bodyPr lIns="50800" rIns="50800" tIns="25400" bIns="25400"/>
@@ -5447,7 +5447,7 @@
                   </a:tcPr>
                 </a:tc>
               </a:tr>
-              <a:tr h="685800">
+              <a:tr h="609600">
                 <a:tc>
                   <a:txBody>
                     <a:bodyPr lIns="50800" rIns="50800" tIns="25400" bIns="25400"/>
@@ -5455,7 +5455,7 @@
                     <a:p>
                       <a:pPr algn="l"/>
                       <a:r>
-                        <a:rPr sz="1150" b="1">
+                        <a:rPr sz="1100" b="1">
                           <a:solidFill>
                             <a:srgbClr val="4A3210"/>
                           </a:solidFill>
@@ -5477,9 +5477,9 @@
                     <a:bodyPr lIns="50800" rIns="50800" tIns="25400" bIns="25400"/>
                     <a:lstStyle/>
                     <a:p>
-                      <a:pPr algn="ctr"/>
+                      <a:pPr algn="l"/>
                       <a:r>
-                        <a:rPr sz="1150" b="0">
+                        <a:rPr sz="1100" b="0">
                           <a:solidFill>
                             <a:srgbClr val="4A3210"/>
                           </a:solidFill>
@@ -5501,9 +5501,9 @@
                     <a:bodyPr lIns="50800" rIns="50800" tIns="25400" bIns="25400"/>
                     <a:lstStyle/>
                     <a:p>
-                      <a:pPr algn="ctr"/>
+                      <a:pPr algn="l"/>
                       <a:r>
-                        <a:rPr sz="1150" b="0">
+                        <a:rPr sz="1100" b="0">
                           <a:solidFill>
                             <a:srgbClr val="4A3210"/>
                           </a:solidFill>
@@ -5525,9 +5525,9 @@
                     <a:bodyPr lIns="50800" rIns="50800" tIns="25400" bIns="25400"/>
                     <a:lstStyle/>
                     <a:p>
-                      <a:pPr algn="ctr"/>
+                      <a:pPr algn="l"/>
                       <a:r>
-                        <a:rPr sz="1150" b="0">
+                        <a:rPr sz="1100" b="0">
                           <a:solidFill>
                             <a:srgbClr val="4A3210"/>
                           </a:solidFill>
@@ -5549,9 +5549,9 @@
                     <a:bodyPr lIns="50800" rIns="50800" tIns="25400" bIns="25400"/>
                     <a:lstStyle/>
                     <a:p>
-                      <a:pPr algn="ctr"/>
+                      <a:pPr algn="l"/>
                       <a:r>
-                        <a:rPr sz="1150" b="0">
+                        <a:rPr sz="1100" b="0">
                           <a:solidFill>
                             <a:srgbClr val="4A3210"/>
                           </a:solidFill>
@@ -5569,7 +5569,7 @@
                   </a:tcPr>
                 </a:tc>
               </a:tr>
-              <a:tr h="685800">
+              <a:tr h="609600">
                 <a:tc>
                   <a:txBody>
                     <a:bodyPr lIns="50800" rIns="50800" tIns="25400" bIns="25400"/>
@@ -5577,7 +5577,7 @@
                     <a:p>
                       <a:pPr algn="l"/>
                       <a:r>
-                        <a:rPr sz="1150" b="1">
+                        <a:rPr sz="1100" b="1">
                           <a:solidFill>
                             <a:srgbClr val="4A3210"/>
                           </a:solidFill>
@@ -5599,9 +5599,9 @@
                     <a:bodyPr lIns="50800" rIns="50800" tIns="25400" bIns="25400"/>
                     <a:lstStyle/>
                     <a:p>
-                      <a:pPr algn="ctr"/>
+                      <a:pPr algn="l"/>
                       <a:r>
-                        <a:rPr sz="1150" b="0">
+                        <a:rPr sz="1100" b="0">
                           <a:solidFill>
                             <a:srgbClr val="4A3210"/>
                           </a:solidFill>
@@ -5623,9 +5623,9 @@
                     <a:bodyPr lIns="50800" rIns="50800" tIns="25400" bIns="25400"/>
                     <a:lstStyle/>
                     <a:p>
-                      <a:pPr algn="ctr"/>
+                      <a:pPr algn="l"/>
                       <a:r>
-                        <a:rPr sz="1150" b="0">
+                        <a:rPr sz="1100" b="0">
                           <a:solidFill>
                             <a:srgbClr val="4A3210"/>
                           </a:solidFill>
@@ -5647,9 +5647,9 @@
                     <a:bodyPr lIns="50800" rIns="50800" tIns="25400" bIns="25400"/>
                     <a:lstStyle/>
                     <a:p>
-                      <a:pPr algn="ctr"/>
+                      <a:pPr algn="l"/>
                       <a:r>
-                        <a:rPr sz="1150" b="0">
+                        <a:rPr sz="1100" b="0">
                           <a:solidFill>
                             <a:srgbClr val="4A3210"/>
                           </a:solidFill>
@@ -5671,9 +5671,9 @@
                     <a:bodyPr lIns="50800" rIns="50800" tIns="25400" bIns="25400"/>
                     <a:lstStyle/>
                     <a:p>
-                      <a:pPr algn="ctr"/>
+                      <a:pPr algn="l"/>
                       <a:r>
-                        <a:rPr sz="1150" b="0">
+                        <a:rPr sz="1100" b="0">
                           <a:solidFill>
                             <a:srgbClr val="4A3210"/>
                           </a:solidFill>
@@ -5691,7 +5691,7 @@
                   </a:tcPr>
                 </a:tc>
               </a:tr>
-              <a:tr h="685800">
+              <a:tr h="609600">
                 <a:tc>
                   <a:txBody>
                     <a:bodyPr lIns="50800" rIns="50800" tIns="25400" bIns="25400"/>
@@ -5699,7 +5699,7 @@
                     <a:p>
                       <a:pPr algn="l"/>
                       <a:r>
-                        <a:rPr sz="1150" b="1">
+                        <a:rPr sz="1100" b="1">
                           <a:solidFill>
                             <a:srgbClr val="4A3210"/>
                           </a:solidFill>
@@ -5721,16 +5721,16 @@
                     <a:bodyPr lIns="50800" rIns="50800" tIns="25400" bIns="25400"/>
                     <a:lstStyle/>
                     <a:p>
-                      <a:pPr algn="ctr"/>
+                      <a:pPr algn="l"/>
                       <a:r>
-                        <a:rPr sz="1150" b="0">
+                        <a:rPr sz="1100" b="0">
                           <a:solidFill>
                             <a:srgbClr val="4A3210"/>
                           </a:solidFill>
                           <a:latin typeface="Microsoft JhengHei"/>
                           <a:ea typeface="Microsoft JhengHei"/>
                         </a:rPr>
-                        <a:t>Google 搜尋衝突</a:t>
+                        <a:t>中道高中關係</a:t>
                       </a:r>
                     </a:p>
                   </a:txBody>
@@ -5745,16 +5745,16 @@
                     <a:bodyPr lIns="50800" rIns="50800" tIns="25400" bIns="25400"/>
                     <a:lstStyle/>
                     <a:p>
-                      <a:pPr algn="ctr"/>
+                      <a:pPr algn="l"/>
                       <a:r>
-                        <a:rPr sz="1150" b="0">
+                        <a:rPr sz="1100" b="0">
                           <a:solidFill>
                             <a:srgbClr val="4A3210"/>
                           </a:solidFill>
                           <a:latin typeface="Microsoft JhengHei"/>
                           <a:ea typeface="Microsoft JhengHei"/>
                         </a:rPr>
-                        <a:t>Google</a:t>
+                        <a:t>正面接觸 / 法律意見</a:t>
                       </a:r>
                     </a:p>
                   </a:txBody>
@@ -5769,16 +5769,16 @@
                     <a:bodyPr lIns="50800" rIns="50800" tIns="25400" bIns="25400"/>
                     <a:lstStyle/>
                     <a:p>
-                      <a:pPr algn="ctr"/>
+                      <a:pPr algn="l"/>
                       <a:r>
-                        <a:rPr sz="1150" b="0">
+                        <a:rPr sz="1100" b="0">
                           <a:solidFill>
                             <a:srgbClr val="4A3210"/>
                           </a:solidFill>
                           <a:latin typeface="Microsoft JhengHei"/>
                           <a:ea typeface="Microsoft JhengHei"/>
                         </a:rPr>
-                        <a:t>需確認無同名公司／品牌</a:t>
+                        <a:t>「中道」二字非高中專屬名詞、借勢學區為描述性使用</a:t>
                       </a:r>
                     </a:p>
                   </a:txBody>
@@ -5793,16 +5793,16 @@
                     <a:bodyPr lIns="50800" rIns="50800" tIns="25400" bIns="25400"/>
                     <a:lstStyle/>
                     <a:p>
-                      <a:pPr algn="ctr"/>
+                      <a:pPr algn="l"/>
                       <a:r>
-                        <a:rPr sz="1150" b="0">
+                        <a:rPr sz="1100" b="0">
                           <a:solidFill>
                             <a:srgbClr val="4A3210"/>
                           </a:solidFill>
                           <a:latin typeface="Microsoft JhengHei"/>
                           <a:ea typeface="Microsoft JhengHei"/>
                         </a:rPr>
-                        <a:t>依命名而定</a:t>
+                        <a:t>建議事前通知、可能合作</a:t>
                       </a:r>
                     </a:p>
                   </a:txBody>
@@ -5813,7 +5813,7 @@
                   </a:tcPr>
                 </a:tc>
               </a:tr>
-              <a:tr h="685800">
+              <a:tr h="609600">
                 <a:tc>
                   <a:txBody>
                     <a:bodyPr lIns="50800" rIns="50800" tIns="25400" bIns="25400"/>
@@ -5821,7 +5821,7 @@
                     <a:p>
                       <a:pPr algn="l"/>
                       <a:r>
-                        <a:rPr sz="1150" b="1">
+                        <a:rPr sz="1100" b="1">
                           <a:solidFill>
                             <a:srgbClr val="4A3210"/>
                           </a:solidFill>
@@ -5843,16 +5843,16 @@
                     <a:bodyPr lIns="50800" rIns="50800" tIns="25400" bIns="25400"/>
                     <a:lstStyle/>
                     <a:p>
-                      <a:pPr algn="ctr"/>
+                      <a:pPr algn="l"/>
                       <a:r>
-                        <a:rPr sz="1150" b="0">
+                        <a:rPr sz="1100" b="0">
                           <a:solidFill>
                             <a:srgbClr val="4A3210"/>
                           </a:solidFill>
                           <a:latin typeface="Microsoft JhengHei"/>
                           <a:ea typeface="Microsoft JhengHei"/>
                         </a:rPr>
-                        <a:t>域名可用性</a:t>
+                        <a:t>Google / 域名 / 社群</a:t>
                       </a:r>
                     </a:p>
                   </a:txBody>
@@ -5867,16 +5867,16 @@
                     <a:bodyPr lIns="50800" rIns="50800" tIns="25400" bIns="25400"/>
                     <a:lstStyle/>
                     <a:p>
-                      <a:pPr algn="ctr"/>
+                      <a:pPr algn="l"/>
                       <a:r>
-                        <a:rPr sz="1150" b="0">
+                        <a:rPr sz="1100" b="0">
                           <a:solidFill>
                             <a:srgbClr val="4A3210"/>
                           </a:solidFill>
                           <a:latin typeface="Microsoft JhengHei"/>
                           <a:ea typeface="Microsoft JhengHei"/>
                         </a:rPr>
-                        <a:t>Google Domains、Gandi</a:t>
+                        <a:t>Google、Gandi、Meta</a:t>
                       </a:r>
                     </a:p>
                   </a:txBody>
@@ -5891,16 +5891,16 @@
                     <a:bodyPr lIns="50800" rIns="50800" tIns="25400" bIns="25400"/>
                     <a:lstStyle/>
                     <a:p>
-                      <a:pPr algn="ctr"/>
+                      <a:pPr algn="l"/>
                       <a:r>
-                        <a:rPr sz="1150" b="0">
+                        <a:rPr sz="1100" b="0">
                           <a:solidFill>
                             <a:srgbClr val="4A3210"/>
                           </a:solidFill>
                           <a:latin typeface="Microsoft JhengHei"/>
                           <a:ea typeface="Microsoft JhengHei"/>
                         </a:rPr>
-                        <a:t>建議買 zhong-dao-sen-huo.com / .tw</a:t>
+                        <a:t>zhongdao-life.com / .tw、IG / FB 帳號註冊</a:t>
                       </a:r>
                     </a:p>
                   </a:txBody>
@@ -5915,9 +5915,9 @@
                     <a:bodyPr lIns="50800" rIns="50800" tIns="25400" bIns="25400"/>
                     <a:lstStyle/>
                     <a:p>
-                      <a:pPr algn="ctr"/>
+                      <a:pPr algn="l"/>
                       <a:r>
-                        <a:rPr sz="1150" b="0">
+                        <a:rPr sz="1100" b="0">
                           <a:solidFill>
                             <a:srgbClr val="4A3210"/>
                           </a:solidFill>
@@ -5935,7 +5935,7 @@
                   </a:tcPr>
                 </a:tc>
               </a:tr>
-              <a:tr h="685800">
+              <a:tr h="609600">
                 <a:tc>
                   <a:txBody>
                     <a:bodyPr lIns="50800" rIns="50800" tIns="25400" bIns="25400"/>
@@ -5943,7 +5943,7 @@
                     <a:p>
                       <a:pPr algn="l"/>
                       <a:r>
-                        <a:rPr sz="1150" b="1">
+                        <a:rPr sz="1100" b="1">
                           <a:solidFill>
                             <a:srgbClr val="4A3210"/>
                           </a:solidFill>
@@ -5965,9 +5965,9 @@
                     <a:bodyPr lIns="50800" rIns="50800" tIns="25400" bIns="25400"/>
                     <a:lstStyle/>
                     <a:p>
-                      <a:pPr algn="ctr"/>
+                      <a:pPr algn="l"/>
                       <a:r>
-                        <a:rPr sz="1150" b="0">
+                        <a:rPr sz="1100" b="0">
                           <a:solidFill>
                             <a:srgbClr val="4A3210"/>
                           </a:solidFill>
@@ -5989,9 +5989,9 @@
                     <a:bodyPr lIns="50800" rIns="50800" tIns="25400" bIns="25400"/>
                     <a:lstStyle/>
                     <a:p>
-                      <a:pPr algn="ctr"/>
+                      <a:pPr algn="l"/>
                       <a:r>
-                        <a:rPr sz="1150" b="0">
+                        <a:rPr sz="1100" b="0">
                           <a:solidFill>
                             <a:srgbClr val="4A3210"/>
                           </a:solidFill>
@@ -6013,9 +6013,9 @@
                     <a:bodyPr lIns="50800" rIns="50800" tIns="25400" bIns="25400"/>
                     <a:lstStyle/>
                     <a:p>
-                      <a:pPr algn="ctr"/>
+                      <a:pPr algn="l"/>
                       <a:r>
-                        <a:rPr sz="1150" b="0">
+                        <a:rPr sz="1100" b="0">
                           <a:solidFill>
                             <a:srgbClr val="4A3210"/>
                           </a:solidFill>
@@ -6037,9 +6037,9 @@
                     <a:bodyPr lIns="50800" rIns="50800" tIns="25400" bIns="25400"/>
                     <a:lstStyle/>
                     <a:p>
-                      <a:pPr algn="ctr"/>
+                      <a:pPr algn="l"/>
                       <a:r>
-                        <a:rPr sz="1150" b="0">
+                        <a:rPr sz="1100" b="0">
                           <a:solidFill>
                             <a:srgbClr val="4A3210"/>
                           </a:solidFill>
@@ -6063,14 +6063,60 @@
       </p:graphicFrame>
       <p:sp>
         <p:nvSpPr>
-          <p:cNvPr id="7" name="TextBox 6"/>
+          <p:cNvPr id="7" name="Rectangle 6"/>
+          <p:cNvSpPr/>
+          <p:nvPr/>
+        </p:nvSpPr>
+        <p:spPr>
+          <a:xfrm>
+            <a:off x="457200" y="5394960"/>
+            <a:ext cx="11247120" cy="914400"/>
+          </a:xfrm>
+          <a:prstGeom prst="rect">
+            <a:avLst/>
+          </a:prstGeom>
+          <a:solidFill>
+            <a:srgbClr val="F5CB4F"/>
+          </a:solidFill>
+          <a:ln w="9525">
+            <a:solidFill>
+              <a:srgbClr val="4A3210"/>
+            </a:solidFill>
+          </a:ln>
+          <a:effectLst/>
+        </p:spPr>
+        <p:style>
+          <a:lnRef idx="1">
+            <a:schemeClr val="accent1"/>
+          </a:lnRef>
+          <a:fillRef idx="3">
+            <a:schemeClr val="accent1"/>
+          </a:fillRef>
+          <a:effectRef idx="2">
+            <a:schemeClr val="accent1"/>
+          </a:effectRef>
+          <a:fontRef idx="minor">
+            <a:schemeClr val="lt1"/>
+          </a:fontRef>
+        </p:style>
+        <p:txBody>
+          <a:bodyPr rtlCol="0" anchor="ctr"/>
+          <a:lstStyle/>
+          <a:p>
+            <a:pPr algn="ctr"/>
+          </a:p>
+        </p:txBody>
+      </p:sp>
+      <p:sp>
+        <p:nvSpPr>
+          <p:cNvPr id="8" name="TextBox 7"/>
           <p:cNvSpPr txBox="1"/>
           <p:nvPr/>
         </p:nvSpPr>
         <p:spPr>
           <a:xfrm>
-            <a:off x="457200" y="5852160"/>
-            <a:ext cx="11247120" cy="457200"/>
+            <a:off x="640080" y="5486400"/>
+            <a:ext cx="10972800" cy="365760"/>
           </a:xfrm>
           <a:prstGeom prst="rect">
             <a:avLst/>
@@ -6091,19 +6137,59 @@
             <a:r>
               <a:rPr sz="1300" b="1">
                 <a:solidFill>
+                  <a:srgbClr val="8B3A0F"/>
+                </a:solidFill>
+                <a:latin typeface="Microsoft JhengHei"/>
+                <a:ea typeface="Microsoft JhengHei"/>
+              </a:rPr>
+              <a:t>與中道高中的關係建議</a:t>
+            </a:r>
+          </a:p>
+        </p:txBody>
+      </p:sp>
+      <p:sp>
+        <p:nvSpPr>
+          <p:cNvPr id="9" name="TextBox 8"/>
+          <p:cNvSpPr txBox="1"/>
+          <p:nvPr/>
+        </p:nvSpPr>
+        <p:spPr>
+          <a:xfrm>
+            <a:off x="640080" y="5852160"/>
+            <a:ext cx="10972800" cy="457200"/>
+          </a:xfrm>
+          <a:prstGeom prst="rect">
+            <a:avLst/>
+          </a:prstGeom>
+          <a:noFill/>
+        </p:spPr>
+        <p:txBody>
+          <a:bodyPr wrap="square" lIns="25400" rIns="25400" tIns="25400" bIns="25400">
+            <a:spAutoFit/>
+          </a:bodyPr>
+          <a:lstStyle/>
+          <a:p>
+            <a:pPr>
+              <a:lnSpc>
+                <a:spcPct val="140000"/>
+              </a:lnSpc>
+            </a:pPr>
+            <a:r>
+              <a:rPr sz="1100" b="0">
+                <a:solidFill>
                   <a:srgbClr val="4A3210"/>
                 </a:solidFill>
                 <a:latin typeface="Microsoft JhengHei"/>
                 <a:ea typeface="Microsoft JhengHei"/>
               </a:rPr>
-              <a:t>璞域可代執行第 1、4、5 項；建議命名定案後 5 個工作天內完成。</a:t>
-            </a:r>
-          </a:p>
-        </p:txBody>
-      </p:sp>
-      <p:sp>
-        <p:nvSpPr>
-          <p:cNvPr id="8" name="TextBox 7"/>
+              <a:t>建議業主在開賣前與中道高中行政部接觸，把「中道森活」定位為「中道學區的住宅選項」— 借勢但不侵權，且可開啟未來合作可能（教師家庭購屋優惠等）。</a:t>
+            </a:r>
+          </a:p>
+        </p:txBody>
+      </p:sp>
+      <p:sp>
+        <p:nvSpPr>
+          <p:cNvPr id="10" name="TextBox 9"/>
           <p:cNvSpPr txBox="1"/>
           <p:nvPr/>
         </p:nvSpPr>
@@ -7636,7 +7722,7 @@
                 <a:latin typeface="Microsoft JhengHei"/>
                 <a:ea typeface="Microsoft JhengHei"/>
               </a:rPr>
-              <a:t>02　「中道」二字的雙重內涵</a:t>
+              <a:t>02　「中道」二字的三重內涵 (含中道學區優勢)</a:t>
             </a:r>
           </a:p>
           <a:p>
@@ -8263,7 +8349,7 @@
                 <a:latin typeface="Microsoft JhengHei"/>
                 <a:ea typeface="Microsoft JhengHei"/>
               </a:rPr>
-              <a:t>命名邏輯：地名 + 森活</a:t>
+              <a:t>「中道」= 宜蘭中道高中（含幼稚園~高中）</a:t>
             </a:r>
           </a:p>
           <a:p>
@@ -8290,34 +8376,34 @@
                 <a:latin typeface="Microsoft JhengHei"/>
                 <a:ea typeface="Microsoft JhengHei"/>
               </a:rPr>
+              <a:t>中道學區是 TA1 / TA2 最強的單一賣點</a:t>
+            </a:r>
+          </a:p>
+          <a:p>
+            <a:pPr>
+              <a:lnSpc>
+                <a:spcPct val="140000"/>
+              </a:lnSpc>
+            </a:pPr>
+            <a:r>
+              <a:rPr sz="1300" b="1">
+                <a:solidFill>
+                  <a:srgbClr val="8B3A0F"/>
+                </a:solidFill>
+                <a:latin typeface="Microsoft JhengHei"/>
+                <a:ea typeface="Microsoft JhengHei"/>
+              </a:rPr>
+              <a:t>• </a:t>
+            </a:r>
+            <a:r>
+              <a:rPr sz="1300">
+                <a:solidFill>
+                  <a:srgbClr val="4A3210"/>
+                </a:solidFill>
+                <a:latin typeface="Microsoft JhengHei"/>
+                <a:ea typeface="Microsoft JhengHei"/>
+              </a:rPr>
               <a:t>主視覺：黃底花卉典雅插畫</a:t>
-            </a:r>
-          </a:p>
-          <a:p>
-            <a:pPr>
-              <a:lnSpc>
-                <a:spcPct val="140000"/>
-              </a:lnSpc>
-            </a:pPr>
-            <a:r>
-              <a:rPr sz="1300" b="1">
-                <a:solidFill>
-                  <a:srgbClr val="8B3A0F"/>
-                </a:solidFill>
-                <a:latin typeface="Microsoft JhengHei"/>
-                <a:ea typeface="Microsoft JhengHei"/>
-              </a:rPr>
-              <a:t>• </a:t>
-            </a:r>
-            <a:r>
-              <a:rPr sz="1300">
-                <a:solidFill>
-                  <a:srgbClr val="4A3210"/>
-                </a:solidFill>
-                <a:latin typeface="Microsoft JhengHei"/>
-                <a:ea typeface="Microsoft JhengHei"/>
-              </a:rPr>
-              <a:t>主文案：「在繁華之中收藏寧靜，在日常之間遇見家的溫度」</a:t>
             </a:r>
           </a:p>
         </p:txBody>
@@ -8791,7 +8877,7 @@
                 <a:latin typeface="Microsoft JhengHei"/>
                 <a:ea typeface="Microsoft JhengHei"/>
               </a:rPr>
-              <a:t>地理與哲學的雙重意涵</a:t>
+              <a:t>教育、哲學、品牌 — 三重內涵</a:t>
             </a:r>
           </a:p>
         </p:txBody>
@@ -8849,6 +8935,277 @@
         <p:spPr>
           <a:xfrm>
             <a:off x="457200" y="1645920"/>
+            <a:ext cx="3657600" cy="4389120"/>
+          </a:xfrm>
+          <a:prstGeom prst="rect">
+            <a:avLst/>
+          </a:prstGeom>
+          <a:solidFill>
+            <a:srgbClr val="F5CB4F"/>
+          </a:solidFill>
+          <a:ln w="9525">
+            <a:solidFill>
+              <a:srgbClr val="8B3A0F"/>
+            </a:solidFill>
+          </a:ln>
+          <a:effectLst/>
+        </p:spPr>
+        <p:style>
+          <a:lnRef idx="1">
+            <a:schemeClr val="accent1"/>
+          </a:lnRef>
+          <a:fillRef idx="3">
+            <a:schemeClr val="accent1"/>
+          </a:fillRef>
+          <a:effectRef idx="2">
+            <a:schemeClr val="accent1"/>
+          </a:effectRef>
+          <a:fontRef idx="minor">
+            <a:schemeClr val="lt1"/>
+          </a:fontRef>
+        </p:style>
+        <p:txBody>
+          <a:bodyPr rtlCol="0" anchor="ctr"/>
+          <a:lstStyle/>
+          <a:p>
+            <a:pPr algn="ctr"/>
+          </a:p>
+        </p:txBody>
+      </p:sp>
+      <p:sp>
+        <p:nvSpPr>
+          <p:cNvPr id="7" name="TextBox 6"/>
+          <p:cNvSpPr txBox="1"/>
+          <p:nvPr/>
+        </p:nvSpPr>
+        <p:spPr>
+          <a:xfrm>
+            <a:off x="457200" y="1783080"/>
+            <a:ext cx="3657600" cy="457200"/>
+          </a:xfrm>
+          <a:prstGeom prst="rect">
+            <a:avLst/>
+          </a:prstGeom>
+          <a:noFill/>
+        </p:spPr>
+        <p:txBody>
+          <a:bodyPr wrap="square" lIns="25400" rIns="25400" tIns="25400" bIns="25400">
+            <a:spAutoFit/>
+          </a:bodyPr>
+          <a:lstStyle/>
+          <a:p>
+            <a:pPr algn="ctr">
+              <a:lnSpc>
+                <a:spcPct val="120000"/>
+              </a:lnSpc>
+            </a:pPr>
+            <a:r>
+              <a:rPr sz="2000" b="1">
+                <a:solidFill>
+                  <a:srgbClr val="8B3A0F"/>
+                </a:solidFill>
+                <a:latin typeface="Microsoft JhengHei"/>
+                <a:ea typeface="Microsoft JhengHei"/>
+              </a:rPr>
+              <a:t>教育層</a:t>
+            </a:r>
+          </a:p>
+        </p:txBody>
+      </p:sp>
+      <p:sp>
+        <p:nvSpPr>
+          <p:cNvPr id="8" name="TextBox 7"/>
+          <p:cNvSpPr txBox="1"/>
+          <p:nvPr/>
+        </p:nvSpPr>
+        <p:spPr>
+          <a:xfrm>
+            <a:off x="685800" y="2423160"/>
+            <a:ext cx="3200400" cy="3383280"/>
+          </a:xfrm>
+          <a:prstGeom prst="rect">
+            <a:avLst/>
+          </a:prstGeom>
+          <a:noFill/>
+        </p:spPr>
+        <p:txBody>
+          <a:bodyPr wrap="square">
+            <a:spAutoFit/>
+          </a:bodyPr>
+          <a:lstStyle/>
+          <a:p>
+            <a:pPr>
+              <a:lnSpc>
+                <a:spcPct val="145000"/>
+              </a:lnSpc>
+            </a:pPr>
+            <a:r>
+              <a:rPr sz="1250" b="1">
+                <a:solidFill>
+                  <a:srgbClr val="8B3A0F"/>
+                </a:solidFill>
+                <a:latin typeface="Microsoft JhengHei"/>
+                <a:ea typeface="Microsoft JhengHei"/>
+              </a:rPr>
+              <a:t>• </a:t>
+            </a:r>
+            <a:r>
+              <a:rPr sz="1250">
+                <a:solidFill>
+                  <a:srgbClr val="4A3210"/>
+                </a:solidFill>
+                <a:latin typeface="Microsoft JhengHei"/>
+                <a:ea typeface="Microsoft JhengHei"/>
+              </a:rPr>
+              <a:t>「中道」= 宜蘭中道高中（私立）</a:t>
+            </a:r>
+          </a:p>
+          <a:p>
+            <a:pPr>
+              <a:lnSpc>
+                <a:spcPct val="145000"/>
+              </a:lnSpc>
+            </a:pPr>
+            <a:r>
+              <a:rPr sz="1250" b="1">
+                <a:solidFill>
+                  <a:srgbClr val="8B3A0F"/>
+                </a:solidFill>
+                <a:latin typeface="Microsoft JhengHei"/>
+                <a:ea typeface="Microsoft JhengHei"/>
+              </a:rPr>
+              <a:t>• </a:t>
+            </a:r>
+            <a:r>
+              <a:rPr sz="1250">
+                <a:solidFill>
+                  <a:srgbClr val="4A3210"/>
+                </a:solidFill>
+                <a:latin typeface="Microsoft JhengHei"/>
+                <a:ea typeface="Microsoft JhengHei"/>
+              </a:rPr>
+              <a:t>完整學程：幼稚園→小學→</a:t>
+            </a:r>
+          </a:p>
+          <a:p>
+            <a:pPr>
+              <a:lnSpc>
+                <a:spcPct val="145000"/>
+              </a:lnSpc>
+            </a:pPr>
+            <a:r>
+              <a:rPr sz="1250" b="1">
+                <a:solidFill>
+                  <a:srgbClr val="8B3A0F"/>
+                </a:solidFill>
+                <a:latin typeface="Microsoft JhengHei"/>
+                <a:ea typeface="Microsoft JhengHei"/>
+              </a:rPr>
+              <a:t>• </a:t>
+            </a:r>
+            <a:r>
+              <a:rPr sz="1250">
+                <a:solidFill>
+                  <a:srgbClr val="4A3210"/>
+                </a:solidFill>
+                <a:latin typeface="Microsoft JhengHei"/>
+                <a:ea typeface="Microsoft JhengHei"/>
+              </a:rPr>
+              <a:t>國中→高中 一條龍</a:t>
+            </a:r>
+          </a:p>
+          <a:p>
+            <a:pPr>
+              <a:lnSpc>
+                <a:spcPct val="145000"/>
+              </a:lnSpc>
+            </a:pPr>
+            <a:r>
+              <a:rPr sz="1250" b="1">
+                <a:solidFill>
+                  <a:srgbClr val="8B3A0F"/>
+                </a:solidFill>
+                <a:latin typeface="Microsoft JhengHei"/>
+                <a:ea typeface="Microsoft JhengHei"/>
+              </a:rPr>
+              <a:t>• </a:t>
+            </a:r>
+            <a:r>
+              <a:rPr sz="1250">
+                <a:solidFill>
+                  <a:srgbClr val="4A3210"/>
+                </a:solidFill>
+                <a:latin typeface="Microsoft JhengHei"/>
+                <a:ea typeface="Microsoft JhengHei"/>
+              </a:rPr>
+              <a:t>宜蘭縣家長心中的優質學區</a:t>
+            </a:r>
+          </a:p>
+          <a:p>
+            <a:pPr>
+              <a:lnSpc>
+                <a:spcPct val="145000"/>
+              </a:lnSpc>
+            </a:pPr>
+            <a:r>
+              <a:rPr sz="1250" b="1">
+                <a:solidFill>
+                  <a:srgbClr val="8B3A0F"/>
+                </a:solidFill>
+                <a:latin typeface="Microsoft JhengHei"/>
+                <a:ea typeface="Microsoft JhengHei"/>
+              </a:rPr>
+              <a:t>• </a:t>
+            </a:r>
+            <a:r>
+              <a:rPr sz="1250">
+                <a:solidFill>
+                  <a:srgbClr val="4A3210"/>
+                </a:solidFill>
+                <a:latin typeface="Microsoft JhengHei"/>
+                <a:ea typeface="Microsoft JhengHei"/>
+              </a:rPr>
+              <a:t>對 TA1 返鄉換屋族：</a:t>
+            </a:r>
+          </a:p>
+          <a:p>
+            <a:pPr>
+              <a:lnSpc>
+                <a:spcPct val="145000"/>
+              </a:lnSpc>
+            </a:pPr>
+            <a:r>
+              <a:rPr sz="1250" b="1">
+                <a:solidFill>
+                  <a:srgbClr val="8B3A0F"/>
+                </a:solidFill>
+                <a:latin typeface="Microsoft JhengHei"/>
+                <a:ea typeface="Microsoft JhengHei"/>
+              </a:rPr>
+              <a:t>• </a:t>
+            </a:r>
+            <a:r>
+              <a:rPr sz="1250">
+                <a:solidFill>
+                  <a:srgbClr val="4A3210"/>
+                </a:solidFill>
+                <a:latin typeface="Microsoft JhengHei"/>
+                <a:ea typeface="Microsoft JhengHei"/>
+              </a:rPr>
+              <a:t>「孩子教育不用換」是最強誘因</a:t>
+            </a:r>
+          </a:p>
+        </p:txBody>
+      </p:sp>
+      <p:sp>
+        <p:nvSpPr>
+          <p:cNvPr id="9" name="Rectangle 8"/>
+          <p:cNvSpPr/>
+          <p:nvPr/>
+        </p:nvSpPr>
+        <p:spPr>
+          <a:xfrm>
+            <a:off x="4297680" y="1645920"/>
             <a:ext cx="3657600" cy="4389120"/>
           </a:xfrm>
           <a:prstGeom prst="rect">
@@ -8888,13 +9245,13 @@
       </p:sp>
       <p:sp>
         <p:nvSpPr>
-          <p:cNvPr id="7" name="TextBox 6"/>
+          <p:cNvPr id="10" name="TextBox 9"/>
           <p:cNvSpPr txBox="1"/>
           <p:nvPr/>
         </p:nvSpPr>
         <p:spPr>
           <a:xfrm>
-            <a:off x="457200" y="1783080"/>
+            <a:off x="4297680" y="1783080"/>
             <a:ext cx="3657600" cy="457200"/>
           </a:xfrm>
           <a:prstGeom prst="rect">
@@ -8921,20 +9278,20 @@
                 <a:latin typeface="Microsoft JhengHei"/>
                 <a:ea typeface="Microsoft JhengHei"/>
               </a:rPr>
-              <a:t>地理層</a:t>
-            </a:r>
-          </a:p>
-        </p:txBody>
-      </p:sp>
-      <p:sp>
-        <p:nvSpPr>
-          <p:cNvPr id="8" name="TextBox 7"/>
+              <a:t>哲學層</a:t>
+            </a:r>
+          </a:p>
+        </p:txBody>
+      </p:sp>
+      <p:sp>
+        <p:nvSpPr>
+          <p:cNvPr id="11" name="TextBox 10"/>
           <p:cNvSpPr txBox="1"/>
           <p:nvPr/>
         </p:nvSpPr>
         <p:spPr>
           <a:xfrm>
-            <a:off x="685800" y="2423160"/>
+            <a:off x="4526280" y="2423160"/>
             <a:ext cx="3200400" cy="3383280"/>
           </a:xfrm>
           <a:prstGeom prst="rect">
@@ -8971,7 +9328,7 @@
                 <a:latin typeface="Microsoft JhengHei"/>
                 <a:ea typeface="Microsoft JhengHei"/>
               </a:rPr>
-              <a:t>壯圍鄉「中道」為當地地段／聚落名</a:t>
+              <a:t>「中庸之道」— 不偏不倚、平衡</a:t>
             </a:r>
           </a:p>
           <a:p>
@@ -8998,7 +9355,7 @@
                 <a:latin typeface="Microsoft JhengHei"/>
                 <a:ea typeface="Microsoft JhengHei"/>
               </a:rPr>
-              <a:t>鄰近順和路、南北五路，</a:t>
+              <a:t>對應客群心境：在工作與家、</a:t>
             </a:r>
           </a:p>
           <a:p>
@@ -9025,7 +9382,7 @@
                 <a:latin typeface="Microsoft JhengHei"/>
                 <a:ea typeface="Microsoft JhengHei"/>
               </a:rPr>
-              <a:t>壯圍鄉內歷史聚落之一</a:t>
+              <a:t>繁華與寧靜、北漂與返鄉之間</a:t>
             </a:r>
           </a:p>
           <a:p>
@@ -9052,118 +9409,9 @@
                 <a:latin typeface="Microsoft JhengHei"/>
                 <a:ea typeface="Microsoft JhengHei"/>
               </a:rPr>
-              <a:t>對在地客（TA2）而言：辨識度極高</a:t>
-            </a:r>
-          </a:p>
-        </p:txBody>
-      </p:sp>
-      <p:sp>
-        <p:nvSpPr>
-          <p:cNvPr id="9" name="Rectangle 8"/>
-          <p:cNvSpPr/>
-          <p:nvPr/>
-        </p:nvSpPr>
-        <p:spPr>
-          <a:xfrm>
-            <a:off x="4297680" y="1645920"/>
-            <a:ext cx="3657600" cy="4389120"/>
-          </a:xfrm>
-          <a:prstGeom prst="rect">
-            <a:avLst/>
-          </a:prstGeom>
-          <a:solidFill>
-            <a:srgbClr val="FFF8E7"/>
-          </a:solidFill>
-          <a:ln w="9525">
-            <a:solidFill>
-              <a:srgbClr val="8B3A0F"/>
-            </a:solidFill>
-          </a:ln>
-          <a:effectLst/>
-        </p:spPr>
-        <p:style>
-          <a:lnRef idx="1">
-            <a:schemeClr val="accent1"/>
-          </a:lnRef>
-          <a:fillRef idx="3">
-            <a:schemeClr val="accent1"/>
-          </a:fillRef>
-          <a:effectRef idx="2">
-            <a:schemeClr val="accent1"/>
-          </a:effectRef>
-          <a:fontRef idx="minor">
-            <a:schemeClr val="lt1"/>
-          </a:fontRef>
-        </p:style>
-        <p:txBody>
-          <a:bodyPr rtlCol="0" anchor="ctr"/>
-          <a:lstStyle/>
-          <a:p>
-            <a:pPr algn="ctr"/>
-          </a:p>
-        </p:txBody>
-      </p:sp>
-      <p:sp>
-        <p:nvSpPr>
-          <p:cNvPr id="10" name="TextBox 9"/>
-          <p:cNvSpPr txBox="1"/>
-          <p:nvPr/>
-        </p:nvSpPr>
-        <p:spPr>
-          <a:xfrm>
-            <a:off x="4297680" y="1783080"/>
-            <a:ext cx="3657600" cy="457200"/>
-          </a:xfrm>
-          <a:prstGeom prst="rect">
-            <a:avLst/>
-          </a:prstGeom>
-          <a:noFill/>
-        </p:spPr>
-        <p:txBody>
-          <a:bodyPr wrap="square" lIns="25400" rIns="25400" tIns="25400" bIns="25400">
-            <a:spAutoFit/>
-          </a:bodyPr>
-          <a:lstStyle/>
-          <a:p>
-            <a:pPr algn="ctr">
-              <a:lnSpc>
-                <a:spcPct val="120000"/>
-              </a:lnSpc>
-            </a:pPr>
-            <a:r>
-              <a:rPr sz="2000" b="1">
-                <a:solidFill>
-                  <a:srgbClr val="8B3A0F"/>
-                </a:solidFill>
-                <a:latin typeface="Microsoft JhengHei"/>
-                <a:ea typeface="Microsoft JhengHei"/>
-              </a:rPr>
-              <a:t>哲學層</a:t>
-            </a:r>
-          </a:p>
-        </p:txBody>
-      </p:sp>
-      <p:sp>
-        <p:nvSpPr>
-          <p:cNvPr id="11" name="TextBox 10"/>
-          <p:cNvSpPr txBox="1"/>
-          <p:nvPr/>
-        </p:nvSpPr>
-        <p:spPr>
-          <a:xfrm>
-            <a:off x="4526280" y="2423160"/>
-            <a:ext cx="3200400" cy="3383280"/>
-          </a:xfrm>
-          <a:prstGeom prst="rect">
-            <a:avLst/>
-          </a:prstGeom>
-          <a:noFill/>
-        </p:spPr>
-        <p:txBody>
-          <a:bodyPr wrap="square">
-            <a:spAutoFit/>
-          </a:bodyPr>
-          <a:lstStyle/>
+              <a:t>對 TA3 退休客：「中道」二字</a:t>
+            </a:r>
+          </a:p>
           <a:p>
             <a:pPr>
               <a:lnSpc>
@@ -9173,7 +9421,7 @@
             <a:r>
               <a:rPr sz="1250" b="1">
                 <a:solidFill>
-                  <a:srgbClr val="8B3A0F"/>
+                  <a:srgbClr val="4A3210"/>
                 </a:solidFill>
                 <a:latin typeface="Microsoft JhengHei"/>
                 <a:ea typeface="Microsoft JhengHei"/>
@@ -9188,115 +9436,7 @@
                 <a:latin typeface="Microsoft JhengHei"/>
                 <a:ea typeface="Microsoft JhengHei"/>
               </a:rPr>
-              <a:t>「中庸之道」— 不偏不倚、平衡</a:t>
-            </a:r>
-          </a:p>
-          <a:p>
-            <a:pPr>
-              <a:lnSpc>
-                <a:spcPct val="145000"/>
-              </a:lnSpc>
-            </a:pPr>
-            <a:r>
-              <a:rPr sz="1250" b="1">
-                <a:solidFill>
-                  <a:srgbClr val="8B3A0F"/>
-                </a:solidFill>
-                <a:latin typeface="Microsoft JhengHei"/>
-                <a:ea typeface="Microsoft JhengHei"/>
-              </a:rPr>
-              <a:t>• </a:t>
-            </a:r>
-            <a:r>
-              <a:rPr sz="1250">
-                <a:solidFill>
-                  <a:srgbClr val="4A3210"/>
-                </a:solidFill>
-                <a:latin typeface="Microsoft JhengHei"/>
-                <a:ea typeface="Microsoft JhengHei"/>
-              </a:rPr>
-              <a:t>對應客群心境：在工作與家、</a:t>
-            </a:r>
-          </a:p>
-          <a:p>
-            <a:pPr>
-              <a:lnSpc>
-                <a:spcPct val="145000"/>
-              </a:lnSpc>
-            </a:pPr>
-            <a:r>
-              <a:rPr sz="1250" b="1">
-                <a:solidFill>
-                  <a:srgbClr val="8B3A0F"/>
-                </a:solidFill>
-                <a:latin typeface="Microsoft JhengHei"/>
-                <a:ea typeface="Microsoft JhengHei"/>
-              </a:rPr>
-              <a:t>• </a:t>
-            </a:r>
-            <a:r>
-              <a:rPr sz="1250">
-                <a:solidFill>
-                  <a:srgbClr val="4A3210"/>
-                </a:solidFill>
-                <a:latin typeface="Microsoft JhengHei"/>
-                <a:ea typeface="Microsoft JhengHei"/>
-              </a:rPr>
-              <a:t>繁華與寧靜、北漂與返鄉之間</a:t>
-            </a:r>
-          </a:p>
-          <a:p>
-            <a:pPr>
-              <a:lnSpc>
-                <a:spcPct val="145000"/>
-              </a:lnSpc>
-            </a:pPr>
-            <a:r>
-              <a:rPr sz="1250" b="1">
-                <a:solidFill>
-                  <a:srgbClr val="8B3A0F"/>
-                </a:solidFill>
-                <a:latin typeface="Microsoft JhengHei"/>
-                <a:ea typeface="Microsoft JhengHei"/>
-              </a:rPr>
-              <a:t>• </a:t>
-            </a:r>
-            <a:r>
-              <a:rPr sz="1250">
-                <a:solidFill>
-                  <a:srgbClr val="4A3210"/>
-                </a:solidFill>
-                <a:latin typeface="Microsoft JhengHei"/>
-                <a:ea typeface="Microsoft JhengHei"/>
-              </a:rPr>
-              <a:t>對返鄉客（TA1）與退休客（TA3）：</a:t>
-            </a:r>
-          </a:p>
-          <a:p>
-            <a:pPr>
-              <a:lnSpc>
-                <a:spcPct val="145000"/>
-              </a:lnSpc>
-            </a:pPr>
-            <a:r>
-              <a:rPr sz="1250" b="1">
-                <a:solidFill>
-                  <a:srgbClr val="8B3A0F"/>
-                </a:solidFill>
-                <a:latin typeface="Microsoft JhengHei"/>
-                <a:ea typeface="Microsoft JhengHei"/>
-              </a:rPr>
-              <a:t>• </a:t>
-            </a:r>
-            <a:r>
-              <a:rPr sz="1250">
-                <a:solidFill>
-                  <a:srgbClr val="4A3210"/>
-                </a:solidFill>
-                <a:latin typeface="Microsoft JhengHei"/>
-                <a:ea typeface="Microsoft JhengHei"/>
-              </a:rPr>
-              <a:t>情感共鳴</a:t>
+              <a:t>本身就有東方文化氣質</a:t>
             </a:r>
           </a:p>
         </p:txBody>
@@ -9486,7 +9626,7 @@
                 <a:latin typeface="Microsoft JhengHei"/>
                 <a:ea typeface="Microsoft JhengHei"/>
               </a:rPr>
-              <a:t>與「玉田」（地名）系列延續性強</a:t>
+              <a:t>「森活」延續玉田森活品牌系列</a:t>
             </a:r>
           </a:p>
           <a:p>
@@ -9513,7 +9653,7 @@
                 <a:latin typeface="Microsoft JhengHei"/>
                 <a:ea typeface="Microsoft JhengHei"/>
               </a:rPr>
-              <a:t>與其他建案不易混淆</a:t>
+              <a:t>「中道」借勢學區、強化辨識度</a:t>
             </a:r>
           </a:p>
         </p:txBody>
@@ -9553,7 +9693,7 @@
                 <a:latin typeface="Microsoft JhengHei"/>
                 <a:ea typeface="Microsoft JhengHei"/>
               </a:rPr>
-              <a:t>中道之於本案：地理錨點 + 心境共鳴 + 品牌延續，三重資產。</a:t>
+              <a:t>中道之於本案：學區保證 + 心境共鳴 + 品牌延續，三重資產（學區是最強）</a:t>
             </a:r>
           </a:p>
         </p:txBody>
@@ -13359,7 +13499,7 @@
                 <a:latin typeface="Microsoft JhengHei"/>
                 <a:ea typeface="Microsoft JhengHei"/>
               </a:rPr>
-              <a:t>「栖」承接主視覺「在繁華之中收藏寧靜」— 一個字打中三組 TA 的共同價值觀「想要一個落腳的家」。</a:t>
+              <a:t>「中道」自帶學區優勢｜「森活」延續品牌｜「栖」打中三組 TA「想要落腳的家」。</a:t>
             </a:r>
           </a:p>
         </p:txBody>
